--- a/demo/deck/pls,fix Demo Deck.pptx
+++ b/demo/deck/pls,fix Demo Deck.pptx
@@ -3775,34 +3775,42 @@
           <a:lstStyle/>
           <a:p>
             <a:pPr>
+              <a:buFont typeface="+mj-lt"/>
+              <a:buAutoNum type="arabicPeriod"/>
               <a:defRPr sz="1800"/>
             </a:pPr>
             <a:r>
-              <a:t>1. P&amp;L table → Slide 2, Where = Whole slide</a:t>
+              <a:t>P&amp;L table → Slide 2, Where = Whole slide</a:t>
             </a:r>
           </a:p>
           <a:p>
             <a:pPr>
+              <a:buFont typeface="+mj-lt"/>
+              <a:buAutoNum type="arabicPeriod"/>
               <a:defRPr sz="1800"/>
             </a:pPr>
             <a:r>
-              <a:t>2. Revenue chart → Slide 3, Where = Left half</a:t>
+              <a:t>Revenue chart → Slide 3, Where = Left half</a:t>
             </a:r>
           </a:p>
           <a:p>
             <a:pPr>
+              <a:buFont typeface="+mj-lt"/>
+              <a:buAutoNum type="arabicPeriod"/>
               <a:defRPr sz="1800"/>
             </a:pPr>
             <a:r>
-              <a:t>3. Segment pie → Slide 3, Where = Right half</a:t>
+              <a:t>Segment pie → Slide 3, Where = Right half</a:t>
             </a:r>
           </a:p>
           <a:p>
             <a:pPr>
+              <a:buFont typeface="+mj-lt"/>
+              <a:buAutoNum type="arabicPeriod"/>
               <a:defRPr sz="1800"/>
             </a:pPr>
             <a:r>
-              <a:t>4. Picture from the Data sheet → Slide 4: select the empty placeholder, Where = Selected shape</a:t>
+              <a:t>Picture from the Data sheet → Slide 4: select the empty placeholder, Where = Selected shape</a:t>
             </a:r>
           </a:p>
           <a:p>
@@ -3810,6 +3818,7 @@
               <a:spcBef>
                 <a:spcPts val="2000"/>
               </a:spcBef>
+              <a:buNone/>
             </a:pPr>
             <a:r>
               <a:rPr b="1" sz="1400"/>

--- a/demo/deck/pls,fix Demo Deck.pptx
+++ b/demo/deck/pls,fix Demo Deck.pptx
@@ -3733,16 +3733,16 @@
         </p:nvSpPr>
         <p:spPr>
           <a:xfrm>
-            <a:off x="457200" y="76200"/>
-            <a:ext cx="11277600" cy="304800"/>
+            <a:off x="457200" y="0"/>
+            <a:ext cx="11277600" cy="228600"/>
           </a:xfrm>
         </p:spPr>
         <p:txBody>
           <a:bodyPr/>
           <a:lstStyle/>
           <a:p>
-            <a:pPr>
-              <a:defRPr sz="2000" b="1">
+            <a:pPr algn="ctr">
+              <a:defRPr sz="1600" b="1">
                 <a:solidFill>
                   <a:srgbClr val="14213D"/>
                 </a:solidFill>
@@ -3839,7 +3839,7 @@
         </p:nvSpPr>
         <p:spPr>
           <a:xfrm>
-            <a:off x="457200" y="406400"/>
+            <a:off x="457200" y="279400"/>
             <a:ext cx="11277600" cy="25400"/>
           </a:xfrm>
           <a:prstGeom prst="rect">
@@ -3905,16 +3905,16 @@
         </p:nvSpPr>
         <p:spPr>
           <a:xfrm>
-            <a:off x="457200" y="76200"/>
-            <a:ext cx="11277600" cy="304800"/>
+            <a:off x="457200" y="0"/>
+            <a:ext cx="11277600" cy="228600"/>
           </a:xfrm>
         </p:spPr>
         <p:txBody>
           <a:bodyPr/>
           <a:lstStyle/>
           <a:p>
-            <a:pPr>
-              <a:defRPr sz="2000" b="1">
+            <a:pPr algn="ctr">
+              <a:defRPr sz="1600" b="1">
                 <a:solidFill>
                   <a:srgbClr val="14213D"/>
                 </a:solidFill>
@@ -3956,7 +3956,7 @@
         </p:nvSpPr>
         <p:spPr>
           <a:xfrm>
-            <a:off x="457200" y="406400"/>
+            <a:off x="457200" y="279400"/>
             <a:ext cx="11277600" cy="25400"/>
           </a:xfrm>
           <a:prstGeom prst="rect">
@@ -4022,16 +4022,16 @@
         </p:nvSpPr>
         <p:spPr>
           <a:xfrm>
-            <a:off x="457200" y="76200"/>
-            <a:ext cx="11277600" cy="304800"/>
+            <a:off x="457200" y="0"/>
+            <a:ext cx="11277600" cy="228600"/>
           </a:xfrm>
         </p:spPr>
         <p:txBody>
           <a:bodyPr/>
           <a:lstStyle/>
           <a:p>
-            <a:pPr>
-              <a:defRPr sz="2000" b="1">
+            <a:pPr algn="ctr">
+              <a:defRPr sz="1600" b="1">
                 <a:solidFill>
                   <a:srgbClr val="14213D"/>
                 </a:solidFill>
@@ -4051,7 +4051,7 @@
         </p:nvSpPr>
         <p:spPr>
           <a:xfrm>
-            <a:off x="457200" y="406400"/>
+            <a:off x="457200" y="279400"/>
             <a:ext cx="11277600" cy="25400"/>
           </a:xfrm>
           <a:prstGeom prst="rect">
@@ -4277,16 +4277,16 @@
         </p:nvSpPr>
         <p:spPr>
           <a:xfrm>
-            <a:off x="457200" y="76200"/>
-            <a:ext cx="11277600" cy="304800"/>
+            <a:off x="457200" y="0"/>
+            <a:ext cx="11277600" cy="228600"/>
           </a:xfrm>
         </p:spPr>
         <p:txBody>
           <a:bodyPr/>
           <a:lstStyle/>
           <a:p>
-            <a:pPr>
-              <a:defRPr sz="2000" b="1">
+            <a:pPr algn="ctr">
+              <a:defRPr sz="1600" b="1">
                 <a:solidFill>
                   <a:srgbClr val="14213D"/>
                 </a:solidFill>
@@ -4356,7 +4356,7 @@
         </p:nvSpPr>
         <p:spPr>
           <a:xfrm>
-            <a:off x="457200" y="406400"/>
+            <a:off x="457200" y="279400"/>
             <a:ext cx="11277600" cy="25400"/>
           </a:xfrm>
           <a:prstGeom prst="rect">

--- a/demo/deck/pls,fix Demo Deck.pptx
+++ b/demo/deck/pls,fix Demo Deck.pptx
@@ -4311,7 +4311,7 @@
         <p:spPr>
           <a:xfrm>
             <a:off x="457200" y="457200"/>
-            <a:ext cx="11277600" cy="5181600"/>
+            <a:ext cx="11277600" cy="5283200"/>
           </a:xfrm>
         </p:spPr>
       </p:sp>
@@ -4327,7 +4327,7 @@
         </p:nvSpPr>
         <p:spPr>
           <a:xfrm>
-            <a:off x="457200" y="5791200"/>
+            <a:off x="457200" y="5892800"/>
             <a:ext cx="11277600" cy="508000"/>
           </a:xfrm>
         </p:spPr>

--- a/demo/deck/pls,fix Demo Deck.pptx
+++ b/demo/deck/pls,fix Demo Deck.pptx
@@ -3734,11 +3734,11 @@
         <p:spPr>
           <a:xfrm>
             <a:off x="457200" y="0"/>
-            <a:ext cx="11277600" cy="228600"/>
+            <a:ext cx="11277600" cy="279400"/>
           </a:xfrm>
         </p:spPr>
         <p:txBody>
-          <a:bodyPr/>
+          <a:bodyPr anchor="t" tIns="0" bIns="0"/>
           <a:lstStyle/>
           <a:p>
             <a:pPr algn="ctr">
@@ -3906,11 +3906,11 @@
         <p:spPr>
           <a:xfrm>
             <a:off x="457200" y="0"/>
-            <a:ext cx="11277600" cy="228600"/>
+            <a:ext cx="11277600" cy="279400"/>
           </a:xfrm>
         </p:spPr>
         <p:txBody>
-          <a:bodyPr/>
+          <a:bodyPr anchor="t" tIns="0" bIns="0"/>
           <a:lstStyle/>
           <a:p>
             <a:pPr algn="ctr">
@@ -4023,11 +4023,11 @@
         <p:spPr>
           <a:xfrm>
             <a:off x="457200" y="0"/>
-            <a:ext cx="11277600" cy="228600"/>
+            <a:ext cx="11277600" cy="279400"/>
           </a:xfrm>
         </p:spPr>
         <p:txBody>
-          <a:bodyPr/>
+          <a:bodyPr anchor="t" tIns="0" bIns="0"/>
           <a:lstStyle/>
           <a:p>
             <a:pPr algn="ctr">
@@ -4278,11 +4278,11 @@
         <p:spPr>
           <a:xfrm>
             <a:off x="457200" y="0"/>
-            <a:ext cx="11277600" cy="228600"/>
+            <a:ext cx="11277600" cy="279400"/>
           </a:xfrm>
         </p:spPr>
         <p:txBody>
-          <a:bodyPr/>
+          <a:bodyPr anchor="t" tIns="0" bIns="0"/>
           <a:lstStyle/>
           <a:p>
             <a:pPr algn="ctr">
